--- a/docs/presentaciones/classes/clase-098-gaussian-mixture-models-presentacion.pptx
+++ b/docs/presentaciones/classes/clase-098-gaussian-mixture-models-presentacion.pptx
@@ -4845,7 +4845,7 @@
                 </a:solidFill>
                 <a:latin typeface="Segoe UI"/>
               </a:rPr>
-              <a:t>Primer bloque ejecutable del notebook.</a:t>
+              <a:t>GaussianMixture asume mezcla de gaussianas. Comparamos predict contra las etiquetas reales con ARI.</a:t>
             </a:r>
           </a:p>
         </p:txBody>
@@ -4932,7 +4932,368 @@
                 </a:solidFill>
                 <a:latin typeface="Courier New"/>
               </a:rPr>
-              <a:t># Imports y configuración inicial</a:t>
+              <a:t>import numpy as np</a:t>
+            </a:r>
+          </a:p>
+          <a:p>
+            <a:pPr>
+              <a:defRPr sz="1200" b="0">
+                <a:solidFill>
+                  <a:srgbClr val="F8FAFC"/>
+                </a:solidFill>
+                <a:latin typeface="Courier New"/>
+              </a:defRPr>
+            </a:pPr>
+            <a:r>
+              <a:rPr sz="1200" b="0">
+                <a:solidFill>
+                  <a:srgbClr val="F8FAFC"/>
+                </a:solidFill>
+                <a:latin typeface="Courier New"/>
+              </a:rPr>
+              <a:t>import matplotlib.pyplot as plt</a:t>
+            </a:r>
+          </a:p>
+          <a:p>
+            <a:pPr>
+              <a:defRPr sz="1200" b="0">
+                <a:solidFill>
+                  <a:srgbClr val="F8FAFC"/>
+                </a:solidFill>
+                <a:latin typeface="Courier New"/>
+              </a:defRPr>
+            </a:pPr>
+            <a:r>
+              <a:rPr sz="1200" b="0">
+                <a:solidFill>
+                  <a:srgbClr val="F8FAFC"/>
+                </a:solidFill>
+                <a:latin typeface="Courier New"/>
+              </a:rPr>
+              <a:t>from sklearn.datasets import make_blobs</a:t>
+            </a:r>
+          </a:p>
+          <a:p>
+            <a:pPr>
+              <a:defRPr sz="1200" b="0">
+                <a:solidFill>
+                  <a:srgbClr val="F8FAFC"/>
+                </a:solidFill>
+                <a:latin typeface="Courier New"/>
+              </a:defRPr>
+            </a:pPr>
+            <a:r>
+              <a:rPr sz="1200" b="0">
+                <a:solidFill>
+                  <a:srgbClr val="F8FAFC"/>
+                </a:solidFill>
+                <a:latin typeface="Courier New"/>
+              </a:rPr>
+              <a:t>from sklearn.mixture import GaussianMixture</a:t>
+            </a:r>
+          </a:p>
+          <a:p>
+            <a:pPr>
+              <a:defRPr sz="1200" b="0">
+                <a:solidFill>
+                  <a:srgbClr val="F8FAFC"/>
+                </a:solidFill>
+                <a:latin typeface="Courier New"/>
+              </a:defRPr>
+            </a:pPr>
+            <a:r>
+              <a:rPr sz="1200" b="0">
+                <a:solidFill>
+                  <a:srgbClr val="F8FAFC"/>
+                </a:solidFill>
+                <a:latin typeface="Courier New"/>
+              </a:rPr>
+              <a:t>from sklearn.metrics import adjusted_rand_score</a:t>
+            </a:r>
+          </a:p>
+          <a:p>
+            <a:pPr>
+              <a:defRPr sz="1200" b="0">
+                <a:solidFill>
+                  <a:srgbClr val="F8FAFC"/>
+                </a:solidFill>
+                <a:latin typeface="Courier New"/>
+              </a:defRPr>
+            </a:pPr>
+            <a:r>
+              <a:rPr sz="1200" b="0">
+                <a:solidFill>
+                  <a:srgbClr val="F8FAFC"/>
+                </a:solidFill>
+                <a:latin typeface="Courier New"/>
+              </a:rPr>
+              <a:t> </a:t>
+            </a:r>
+          </a:p>
+          <a:p>
+            <a:pPr>
+              <a:defRPr sz="1200" b="0">
+                <a:solidFill>
+                  <a:srgbClr val="F8FAFC"/>
+                </a:solidFill>
+                <a:latin typeface="Courier New"/>
+              </a:defRPr>
+            </a:pPr>
+            <a:r>
+              <a:rPr sz="1200" b="0">
+                <a:solidFill>
+                  <a:srgbClr val="F8FAFC"/>
+                </a:solidFill>
+                <a:latin typeface="Courier New"/>
+              </a:rPr>
+              <a:t>np.random.seed(42)</a:t>
+            </a:r>
+          </a:p>
+          <a:p>
+            <a:pPr>
+              <a:defRPr sz="1200" b="0">
+                <a:solidFill>
+                  <a:srgbClr val="F8FAFC"/>
+                </a:solidFill>
+                <a:latin typeface="Courier New"/>
+              </a:defRPr>
+            </a:pPr>
+            <a:r>
+              <a:rPr sz="1200" b="0">
+                <a:solidFill>
+                  <a:srgbClr val="F8FAFC"/>
+                </a:solidFill>
+                <a:latin typeface="Courier New"/>
+              </a:rPr>
+              <a:t>X, y_true = make_blobs(n_samples=1000, centers=3, cluster_std=[1.0, 2.0, 0.5], random_state=42)</a:t>
+            </a:r>
+          </a:p>
+          <a:p>
+            <a:pPr>
+              <a:defRPr sz="1200" b="0">
+                <a:solidFill>
+                  <a:srgbClr val="F8FAFC"/>
+                </a:solidFill>
+                <a:latin typeface="Courier New"/>
+              </a:defRPr>
+            </a:pPr>
+            <a:r>
+              <a:rPr sz="1200" b="0">
+                <a:solidFill>
+                  <a:srgbClr val="F8FAFC"/>
+                </a:solidFill>
+                <a:latin typeface="Courier New"/>
+              </a:rPr>
+              <a:t> </a:t>
+            </a:r>
+          </a:p>
+          <a:p>
+            <a:pPr>
+              <a:defRPr sz="1200" b="0">
+                <a:solidFill>
+                  <a:srgbClr val="F8FAFC"/>
+                </a:solidFill>
+                <a:latin typeface="Courier New"/>
+              </a:defRPr>
+            </a:pPr>
+            <a:r>
+              <a:rPr sz="1200" b="0">
+                <a:solidFill>
+                  <a:srgbClr val="F8FAFC"/>
+                </a:solidFill>
+                <a:latin typeface="Courier New"/>
+              </a:rPr>
+              <a:t>gmm = GaussianMixture(n_components=3, n_init=10, random_state=42).fit(X)</a:t>
+            </a:r>
+          </a:p>
+          <a:p>
+            <a:pPr>
+              <a:defRPr sz="1200" b="0">
+                <a:solidFill>
+                  <a:srgbClr val="F8FAFC"/>
+                </a:solidFill>
+                <a:latin typeface="Courier New"/>
+              </a:defRPr>
+            </a:pPr>
+            <a:r>
+              <a:rPr sz="1200" b="0">
+                <a:solidFill>
+                  <a:srgbClr val="F8FAFC"/>
+                </a:solidFill>
+                <a:latin typeface="Courier New"/>
+              </a:rPr>
+              <a:t>labels = gmm.predict(X)</a:t>
+            </a:r>
+          </a:p>
+          <a:p>
+            <a:pPr>
+              <a:defRPr sz="1200" b="0">
+                <a:solidFill>
+                  <a:srgbClr val="F8FAFC"/>
+                </a:solidFill>
+                <a:latin typeface="Courier New"/>
+              </a:defRPr>
+            </a:pPr>
+            <a:r>
+              <a:rPr sz="1200" b="0">
+                <a:solidFill>
+                  <a:srgbClr val="F8FAFC"/>
+                </a:solidFill>
+                <a:latin typeface="Courier New"/>
+              </a:rPr>
+              <a:t>print("ARI GMM vs verdad:", round(adjusted_rand_score(y_true, labels), 4))</a:t>
+            </a:r>
+          </a:p>
+          <a:p>
+            <a:pPr>
+              <a:defRPr sz="1200" b="0">
+                <a:solidFill>
+                  <a:srgbClr val="F8FAFC"/>
+                </a:solidFill>
+                <a:latin typeface="Courier New"/>
+              </a:defRPr>
+            </a:pPr>
+            <a:r>
+              <a:rPr sz="1200" b="0">
+                <a:solidFill>
+                  <a:srgbClr val="F8FAFC"/>
+                </a:solidFill>
+                <a:latin typeface="Courier New"/>
+              </a:rPr>
+              <a:t>print("pesos de mezcla:", gmm.weights_.round(3))</a:t>
+            </a:r>
+          </a:p>
+          <a:p>
+            <a:pPr>
+              <a:defRPr sz="1200" b="0">
+                <a:solidFill>
+                  <a:srgbClr val="F8FAFC"/>
+                </a:solidFill>
+                <a:latin typeface="Courier New"/>
+              </a:defRPr>
+            </a:pPr>
+            <a:r>
+              <a:rPr sz="1200" b="0">
+                <a:solidFill>
+                  <a:srgbClr val="F8FAFC"/>
+                </a:solidFill>
+                <a:latin typeface="Courier New"/>
+              </a:rPr>
+              <a:t>assert gmm.converged_, "EM deberia converger"</a:t>
+            </a:r>
+          </a:p>
+          <a:p>
+            <a:pPr>
+              <a:defRPr sz="1200" b="0">
+                <a:solidFill>
+                  <a:srgbClr val="F8FAFC"/>
+                </a:solidFill>
+                <a:latin typeface="Courier New"/>
+              </a:defRPr>
+            </a:pPr>
+            <a:r>
+              <a:rPr sz="1200" b="0">
+                <a:solidFill>
+                  <a:srgbClr val="F8FAFC"/>
+                </a:solidFill>
+                <a:latin typeface="Courier New"/>
+              </a:rPr>
+              <a:t> </a:t>
+            </a:r>
+          </a:p>
+          <a:p>
+            <a:pPr>
+              <a:defRPr sz="1200" b="0">
+                <a:solidFill>
+                  <a:srgbClr val="F8FAFC"/>
+                </a:solidFill>
+                <a:latin typeface="Courier New"/>
+              </a:defRPr>
+            </a:pPr>
+            <a:r>
+              <a:rPr sz="1200" b="0">
+                <a:solidFill>
+                  <a:srgbClr val="F8FAFC"/>
+                </a:solidFill>
+                <a:latin typeface="Courier New"/>
+              </a:rPr>
+              <a:t>plt.figure(figsize=(7, 5))</a:t>
+            </a:r>
+          </a:p>
+          <a:p>
+            <a:pPr>
+              <a:defRPr sz="1200" b="0">
+                <a:solidFill>
+                  <a:srgbClr val="F8FAFC"/>
+                </a:solidFill>
+                <a:latin typeface="Courier New"/>
+              </a:defRPr>
+            </a:pPr>
+            <a:r>
+              <a:rPr sz="1200" b="0">
+                <a:solidFill>
+                  <a:srgbClr val="F8FAFC"/>
+                </a:solidFill>
+                <a:latin typeface="Courier New"/>
+              </a:rPr>
+              <a:t>plt.scatter(X[:, 0], X[:, 1], c=labels, cmap="tab10", s=10, alpha=0.6)</a:t>
+            </a:r>
+          </a:p>
+          <a:p>
+            <a:pPr>
+              <a:defRPr sz="1200" b="0">
+                <a:solidFill>
+                  <a:srgbClr val="F8FAFC"/>
+                </a:solidFill>
+                <a:latin typeface="Courier New"/>
+              </a:defRPr>
+            </a:pPr>
+            <a:r>
+              <a:rPr sz="1200" b="0">
+                <a:solidFill>
+                  <a:srgbClr val="F8FAFC"/>
+                </a:solidFill>
+                <a:latin typeface="Courier New"/>
+              </a:rPr>
+              <a:t>plt.scatter(gmm.means_[:, 0], gmm.means_[:, 1], c="black", marker="X", s=150)</a:t>
+            </a:r>
+          </a:p>
+          <a:p>
+            <a:pPr>
+              <a:defRPr sz="1200" b="0">
+                <a:solidFill>
+                  <a:srgbClr val="F8FAFC"/>
+                </a:solidFill>
+                <a:latin typeface="Courier New"/>
+              </a:defRPr>
+            </a:pPr>
+            <a:r>
+              <a:rPr sz="1200" b="0">
+                <a:solidFill>
+                  <a:srgbClr val="F8FAFC"/>
+                </a:solidFill>
+                <a:latin typeface="Courier New"/>
+              </a:rPr>
+              <a:t>plt.title("GMM (3 componentes) sobre blobs de varianza distinta")</a:t>
+            </a:r>
+          </a:p>
+          <a:p>
+            <a:pPr>
+              <a:defRPr sz="1200" b="0">
+                <a:solidFill>
+                  <a:srgbClr val="F8FAFC"/>
+                </a:solidFill>
+                <a:latin typeface="Courier New"/>
+              </a:defRPr>
+            </a:pPr>
+            <a:r>
+              <a:rPr sz="1200" b="0">
+                <a:solidFill>
+                  <a:srgbClr val="F8FAFC"/>
+                </a:solidFill>
+                <a:latin typeface="Courier New"/>
+              </a:rPr>
+              <a:t>plt.tight_layout(); plt.show()</a:t>
             </a:r>
           </a:p>
         </p:txBody>

--- a/docs/presentaciones/classes/clase-098-gaussian-mixture-models-presentacion.pptx
+++ b/docs/presentaciones/classes/clase-098-gaussian-mixture-models-presentacion.pptx
@@ -3272,7 +3272,7 @@
                 </a:solidFill>
                 <a:latin typeface="Segoe UI"/>
               </a:rPr>
-              <a:t>Parte: 1 — Machine Learning Clásico · Fuente: Géron, cap. 9.  Duración estimada: 70 min.</a:t>
+              <a:t>Parte: 1 — Machine Learning Clásico · Fuente: Géron, cap. 9.  Duración estimada: 70 min. · Nivel: Intermedio</a:t>
             </a:r>
           </a:p>
         </p:txBody>
@@ -3581,7 +3581,7 @@
                 </a:solidFill>
                 <a:latin typeface="Segoe UI"/>
               </a:rPr>
-              <a:t>Parte: 1 — Machine Learning Clásico · Fuente: Géron, cap. 9.  Duración estimada: 70 min.</a:t>
+              <a:t>Parte: 1 — Machine Learning Clásico · Fuente: Géron, cap. 9.  Duración estimada: 70 min. · Nivel: Intermedio</a:t>
             </a:r>
           </a:p>
         </p:txBody>
